--- a/dataset/guides_final/HW/guide/IT-HW-002_업무 장비 교체·수리 신청 가이드.pptx
+++ b/dataset/guides_final/HW/guide/IT-HW-002_업무 장비 교체·수리 신청 가이드.pptx
@@ -3247,7 +3247,7 @@
                 <a:ea typeface="Malgun Gothic"/>
                 <a:cs typeface="Malgun Gothic"/>
               </a:rPr>
-              <a:t>한화시스템 ICT 임직원 IT 안내 · HW·업무 PC</a:t>
+              <a:t>가상 ICT 기업 임직원 IT 안내 · HW·업무 PC</a:t>
             </a:r>
           </a:p>
         </p:txBody>
@@ -3479,7 +3479,7 @@
                 <a:ea typeface="Malgun Gothic"/>
                 <a:cs typeface="Malgun Gothic"/>
               </a:rPr>
-              <a:t>© HANWHA SYSTEMS ICT · IT-HW-002 · 사내 일반</a:t>
+              <a:t>© 가상 ICT 기업 · IT-HW-002 · 사내 일반</a:t>
             </a:r>
           </a:p>
         </p:txBody>
@@ -5612,7 +5612,7 @@
                 <a:ea typeface="Malgun Gothic"/>
                 <a:cs typeface="Malgun Gothic"/>
               </a:rPr>
-              <a:t>© HANWHA SYSTEMS ICT · IT-HW-002 · 사내 일반</a:t>
+              <a:t>© 가상 ICT 기업 · IT-HW-002 · 사내 일반</a:t>
             </a:r>
           </a:p>
         </p:txBody>
@@ -6645,7 +6645,7 @@
                 <a:ea typeface="Malgun Gothic"/>
                 <a:cs typeface="Malgun Gothic"/>
               </a:rPr>
-              <a:t>© HANWHA SYSTEMS ICT · IT-HW-002 · 사내 일반</a:t>
+              <a:t>© 가상 ICT 기업 · IT-HW-002 · 사내 일반</a:t>
             </a:r>
           </a:p>
         </p:txBody>
@@ -7492,7 +7492,7 @@
                 <a:ea typeface="Malgun Gothic"/>
                 <a:cs typeface="Malgun Gothic"/>
               </a:rPr>
-              <a:t>© HANWHA SYSTEMS ICT · IT-HW-002 · 사내 일반</a:t>
+              <a:t>© 가상 ICT 기업 · IT-HW-002 · 사내 일반</a:t>
             </a:r>
           </a:p>
         </p:txBody>
@@ -9531,7 +9531,7 @@
                 <a:ea typeface="Malgun Gothic"/>
                 <a:cs typeface="Malgun Gothic"/>
               </a:rPr>
-              <a:t>© HANWHA SYSTEMS ICT · IT-HW-002 · 사내 일반</a:t>
+              <a:t>© 가상 ICT 기업 · IT-HW-002 · 사내 일반</a:t>
             </a:r>
           </a:p>
         </p:txBody>
@@ -10470,7 +10470,7 @@
                 <a:ea typeface="Malgun Gothic"/>
                 <a:cs typeface="Malgun Gothic"/>
               </a:rPr>
-              <a:t>© HANWHA SYSTEMS ICT · IT-HW-002 · 사내 일반</a:t>
+              <a:t>© 가상 ICT 기업 · IT-HW-002 · 사내 일반</a:t>
             </a:r>
           </a:p>
         </p:txBody>
@@ -11317,7 +11317,7 @@
                 <a:ea typeface="Malgun Gothic"/>
                 <a:cs typeface="Malgun Gothic"/>
               </a:rPr>
-              <a:t>© HANWHA SYSTEMS ICT · IT-HW-002 · 사내 일반</a:t>
+              <a:t>© 가상 ICT 기업 · IT-HW-002 · 사내 일반</a:t>
             </a:r>
           </a:p>
         </p:txBody>
@@ -13565,7 +13565,7 @@
                 <a:ea typeface="Malgun Gothic"/>
                 <a:cs typeface="Malgun Gothic"/>
               </a:rPr>
-              <a:t>© HANWHA SYSTEMS ICT · IT-HW-002 · 사내 일반</a:t>
+              <a:t>© 가상 ICT 기업 · IT-HW-002 · 사내 일반</a:t>
             </a:r>
           </a:p>
         </p:txBody>
@@ -14553,7 +14553,7 @@
                 <a:ea typeface="Malgun Gothic"/>
                 <a:cs typeface="Malgun Gothic"/>
               </a:rPr>
-              <a:t>© HANWHA SYSTEMS ICT · IT-HW-002 · 사내 일반</a:t>
+              <a:t>© 가상 ICT 기업 · IT-HW-002 · 사내 일반</a:t>
             </a:r>
           </a:p>
         </p:txBody>
@@ -16731,7 +16731,7 @@
                 <a:ea typeface="Malgun Gothic"/>
                 <a:cs typeface="Malgun Gothic"/>
               </a:rPr>
-              <a:t>© HANWHA SYSTEMS ICT · IT-HW-002 · 사내 일반</a:t>
+              <a:t>© 가상 ICT 기업 · IT-HW-002 · 사내 일반</a:t>
             </a:r>
           </a:p>
         </p:txBody>
@@ -17813,7 +17813,7 @@
                 <a:ea typeface="Malgun Gothic"/>
                 <a:cs typeface="Malgun Gothic"/>
               </a:rPr>
-              <a:t>© HANWHA SYSTEMS ICT · IT-HW-002 · 사내 일반</a:t>
+              <a:t>© 가상 ICT 기업 · IT-HW-002 · 사내 일반</a:t>
             </a:r>
           </a:p>
         </p:txBody>
@@ -19618,7 +19618,7 @@
                 <a:ea typeface="Malgun Gothic"/>
                 <a:cs typeface="Malgun Gothic"/>
               </a:rPr>
-              <a:t>© HANWHA SYSTEMS ICT · IT-HW-002 · 사내 일반</a:t>
+              <a:t>© 가상 ICT 기업 · IT-HW-002 · 사내 일반</a:t>
             </a:r>
           </a:p>
         </p:txBody>
@@ -21866,7 +21866,7 @@
                 <a:ea typeface="Malgun Gothic"/>
                 <a:cs typeface="Malgun Gothic"/>
               </a:rPr>
-              <a:t>© HANWHA SYSTEMS ICT · IT-HW-002 · 사내 일반</a:t>
+              <a:t>© 가상 ICT 기업 · IT-HW-002 · 사내 일반</a:t>
             </a:r>
           </a:p>
         </p:txBody>
@@ -22854,7 +22854,7 @@
                 <a:ea typeface="Malgun Gothic"/>
                 <a:cs typeface="Malgun Gothic"/>
               </a:rPr>
-              <a:t>© HANWHA SYSTEMS ICT · IT-HW-002 · 사내 일반</a:t>
+              <a:t>© 가상 ICT 기업 · IT-HW-002 · 사내 일반</a:t>
             </a:r>
           </a:p>
         </p:txBody>
@@ -25008,7 +25008,7 @@
                 <a:ea typeface="Malgun Gothic"/>
                 <a:cs typeface="Malgun Gothic"/>
               </a:rPr>
-              <a:t>© HANWHA SYSTEMS ICT · IT-HW-002 · 사내 일반</a:t>
+              <a:t>© 가상 ICT 기업 · IT-HW-002 · 사내 일반</a:t>
             </a:r>
           </a:p>
         </p:txBody>
@@ -25996,7 +25996,7 @@
                 <a:ea typeface="Malgun Gothic"/>
                 <a:cs typeface="Malgun Gothic"/>
               </a:rPr>
-              <a:t>© HANWHA SYSTEMS ICT · IT-HW-002 · 사내 일반</a:t>
+              <a:t>© 가상 ICT 기업 · IT-HW-002 · 사내 일반</a:t>
             </a:r>
           </a:p>
         </p:txBody>
@@ -28268,7 +28268,7 @@
                 <a:ea typeface="Malgun Gothic"/>
                 <a:cs typeface="Malgun Gothic"/>
               </a:rPr>
-              <a:t>© HANWHA SYSTEMS ICT · IT-HW-002 · 사내 일반</a:t>
+              <a:t>© 가상 ICT 기업 · IT-HW-002 · 사내 일반</a:t>
             </a:r>
           </a:p>
         </p:txBody>
@@ -29369,7 +29369,7 @@
                 <a:ea typeface="Malgun Gothic"/>
                 <a:cs typeface="Malgun Gothic"/>
               </a:rPr>
-              <a:t>© HANWHA SYSTEMS ICT · IT-HW-002 · 사내 일반</a:t>
+              <a:t>© 가상 ICT 기업 · IT-HW-002 · 사내 일반</a:t>
             </a:r>
           </a:p>
         </p:txBody>
@@ -29617,7 +29617,7 @@
                 <a:ea typeface="Malgun Gothic"/>
                 <a:cs typeface="Malgun Gothic"/>
               </a:rPr>
-              <a:t>© HANWHA SYSTEMS ICT · IT-HW-002 · 사내 일반</a:t>
+              <a:t>© 가상 ICT 기업 · IT-HW-002 · 사내 일반</a:t>
             </a:r>
           </a:p>
         </p:txBody>
@@ -30310,7 +30310,7 @@
                 <a:ea typeface="Malgun Gothic"/>
                 <a:cs typeface="Malgun Gothic"/>
               </a:rPr>
-              <a:t>© HANWHA SYSTEMS ICT · IT-HW-002 · 사내 일반</a:t>
+              <a:t>© 가상 ICT 기업 · IT-HW-002 · 사내 일반</a:t>
             </a:r>
           </a:p>
         </p:txBody>
@@ -30558,7 +30558,7 @@
                 <a:ea typeface="Malgun Gothic"/>
                 <a:cs typeface="Malgun Gothic"/>
               </a:rPr>
-              <a:t>© HANWHA SYSTEMS ICT · IT-HW-002 · 사내 일반</a:t>
+              <a:t>© 가상 ICT 기업 · IT-HW-002 · 사내 일반</a:t>
             </a:r>
           </a:p>
         </p:txBody>
@@ -31217,7 +31217,7 @@
                 <a:ea typeface="Malgun Gothic"/>
                 <a:cs typeface="Malgun Gothic"/>
               </a:rPr>
-              <a:t>© HANWHA SYSTEMS ICT · IT-HW-002 · 사내 일반</a:t>
+              <a:t>© 가상 ICT 기업 · IT-HW-002 · 사내 일반</a:t>
             </a:r>
           </a:p>
         </p:txBody>
@@ -32493,7 +32493,7 @@
                 <a:ea typeface="Malgun Gothic"/>
                 <a:cs typeface="Malgun Gothic"/>
               </a:rPr>
-              <a:t>© HANWHA SYSTEMS ICT · IT-HW-002 · 사내 일반</a:t>
+              <a:t>© 가상 ICT 기업 · IT-HW-002 · 사내 일반</a:t>
             </a:r>
           </a:p>
         </p:txBody>
@@ -32741,7 +32741,7 @@
                 <a:ea typeface="Malgun Gothic"/>
                 <a:cs typeface="Malgun Gothic"/>
               </a:rPr>
-              <a:t>© HANWHA SYSTEMS ICT · IT-HW-002 · 사내 일반</a:t>
+              <a:t>© 가상 ICT 기업 · IT-HW-002 · 사내 일반</a:t>
             </a:r>
           </a:p>
         </p:txBody>
@@ -33253,7 +33253,7 @@
                           <a:ea typeface="Malgun Gothic"/>
                           <a:cs typeface="Malgun Gothic"/>
                         </a:rPr>
-                        <a:t>사내 IT 포털(hanwha-admin) 상단 [챗봇 문의]</a:t>
+                        <a:t>사내 IT 포털 상단 [챗봇 문의]</a:t>
                       </a:r>
                     </a:p>
                   </a:txBody>
@@ -33945,7 +33945,7 @@
                           <a:ea typeface="Malgun Gothic"/>
                           <a:cs typeface="Malgun Gothic"/>
                         </a:rPr>
-                        <a:t>it-helpdesk@hanwha-ict.example</a:t>
+                        <a:t>it-helpdesk@ict.example</a:t>
                       </a:r>
                     </a:p>
                   </a:txBody>
@@ -34244,7 +34244,7 @@
                 <a:ea typeface="Malgun Gothic"/>
                 <a:cs typeface="Malgun Gothic"/>
               </a:rPr>
-              <a:t>© HANWHA SYSTEMS ICT · IT-HW-002 · 사내 일반</a:t>
+              <a:t>© 가상 ICT 기업 · IT-HW-002 · 사내 일반</a:t>
             </a:r>
           </a:p>
         </p:txBody>
@@ -34492,7 +34492,7 @@
                 <a:ea typeface="Malgun Gothic"/>
                 <a:cs typeface="Malgun Gothic"/>
               </a:rPr>
-              <a:t>© HANWHA SYSTEMS ICT · IT-HW-002 · 사내 일반</a:t>
+              <a:t>© 가상 ICT 기업 · IT-HW-002 · 사내 일반</a:t>
             </a:r>
           </a:p>
         </p:txBody>
@@ -36093,7 +36093,7 @@
                 <a:ea typeface="Malgun Gothic"/>
                 <a:cs typeface="Malgun Gothic"/>
               </a:rPr>
-              <a:t>© HANWHA SYSTEMS ICT · IT-HW-002 · 사내 일반</a:t>
+              <a:t>© 가상 ICT 기업 · IT-HW-002 · 사내 일반</a:t>
             </a:r>
           </a:p>
         </p:txBody>
@@ -37070,7 +37070,7 @@
                 <a:ea typeface="Malgun Gothic"/>
                 <a:cs typeface="Malgun Gothic"/>
               </a:rPr>
-              <a:t>© HANWHA SYSTEMS ICT · IT-HW-002 · 사내 일반</a:t>
+              <a:t>© 가상 ICT 기업 · IT-HW-002 · 사내 일반</a:t>
             </a:r>
           </a:p>
         </p:txBody>
@@ -37318,7 +37318,7 @@
                 <a:ea typeface="Malgun Gothic"/>
                 <a:cs typeface="Malgun Gothic"/>
               </a:rPr>
-              <a:t>© HANWHA SYSTEMS ICT · IT-HW-002 · 사내 일반</a:t>
+              <a:t>© 가상 ICT 기업 · IT-HW-002 · 사내 일반</a:t>
             </a:r>
           </a:p>
         </p:txBody>
@@ -38086,7 +38086,7 @@
                 <a:ea typeface="Malgun Gothic"/>
                 <a:cs typeface="Malgun Gothic"/>
               </a:rPr>
-              <a:t>© HANWHA SYSTEMS ICT · IT-HW-002 · 사내 일반</a:t>
+              <a:t>© 가상 ICT 기업 · IT-HW-002 · 사내 일반</a:t>
             </a:r>
           </a:p>
         </p:txBody>
@@ -38334,7 +38334,7 @@
                 <a:ea typeface="Malgun Gothic"/>
                 <a:cs typeface="Malgun Gothic"/>
               </a:rPr>
-              <a:t>© HANWHA SYSTEMS ICT · IT-HW-002 · 사내 일반</a:t>
+              <a:t>© 가상 ICT 기업 · IT-HW-002 · 사내 일반</a:t>
             </a:r>
           </a:p>
         </p:txBody>
@@ -39181,7 +39181,7 @@
                 <a:ea typeface="Malgun Gothic"/>
                 <a:cs typeface="Malgun Gothic"/>
               </a:rPr>
-              <a:t>© HANWHA SYSTEMS ICT · IT-HW-002 · 사내 일반</a:t>
+              <a:t>© 가상 ICT 기업 · IT-HW-002 · 사내 일반</a:t>
             </a:r>
           </a:p>
         </p:txBody>
@@ -39429,7 +39429,7 @@
                 <a:ea typeface="Malgun Gothic"/>
                 <a:cs typeface="Malgun Gothic"/>
               </a:rPr>
-              <a:t>© HANWHA SYSTEMS ICT · IT-HW-002 · 사내 일반</a:t>
+              <a:t>© 가상 ICT 기업 · IT-HW-002 · 사내 일반</a:t>
             </a:r>
           </a:p>
         </p:txBody>
@@ -41957,7 +41957,7 @@
                 <a:ea typeface="Malgun Gothic"/>
                 <a:cs typeface="Malgun Gothic"/>
               </a:rPr>
-              <a:t>© HANWHA SYSTEMS ICT · IT-HW-002 · 사내 일반</a:t>
+              <a:t>© 가상 ICT 기업 · IT-HW-002 · 사내 일반</a:t>
             </a:r>
           </a:p>
         </p:txBody>
